--- a/slides/pptx/week13.pptx
+++ b/slides/pptx/week13.pptx
@@ -692,7 +692,8 @@
           <a:p>
             <a:r>
               <a:rPr lang="en-US" dirty="0"/>
-              <a:t>The whole lab's argument as one picture — walk it row by row once, landing on the Trivy split at the bottom: 3 rows have a rule ID to cite, 4 don't. That 3-of-7 (or "3 of 6" container-only, per the earlier slide) split is Task 1's actual grading rubric, not trivia. ~5 min.</a:t>
+              <a:t>The whole lab's argument as one picture — walk it row by row once, landing on the Trivy split at the bottom: 3 rows have a rule ID to cite, 4 don't. That 3-of-7 (or "3 of 6" container-only, per the earlier slide) split is Task 1's actual grading rubric, not trivia. ~5 min.
+Diagram: The same app as two container images side by side, insecure vs hardened, six layers compared: mutable :latest tag vs a pinned digest, a baked-in secret vs runtime injection, root user vs distroless non-root, COPY-everything vs a minimal context, world-writable permissions vs read-only, and an unpinned pip install vs a discarded build stage. Below both, the same argument one layer up: the wildcard IAM policy vs the scoped one. The conclusion: Trivy flags only three of the seven defects shown here — the tag, the root user, and the secret. COPY .., chmod 777, the unpinned install, and the IAM JSON all need manual review; there is no rule for any of them.</a:t>
             </a:r>
             <a:endParaRPr lang="en-US" dirty="0"/>
           </a:p>
@@ -2123,7 +2124,7 @@
       </p:grpSpPr>
       <p:pic>
         <p:nvPicPr>
-          <p:cNvPr id="2" name="Image 0" descr="/Users/pop7/Library/CloudStorage/OneDrive-MonsterConnectCo.,Ltd/Lecture/KOSEN69 - software-security/slides/pptx/assets/logo-small.png">    </p:cNvPr>
+          <p:cNvPr id="2" name="Image 0" descr="/private/tmp/claude-501/-Users-pop7-Library-CloudStorage-OneDrive-MonsterConnectCo--Ltd-Lecture-KOSEN69---software-security/e6d6556f-17de-403d-a9a0-cf2f846149b4/scratchpad/tree/slides/pptx/assets/logo-small.png">    </p:cNvPr>
           <p:cNvPicPr>
             <a:picLocks noChangeAspect="1"/>
           </p:cNvPicPr>
@@ -2523,7 +2524,7 @@
       </p:sp>
       <p:pic>
         <p:nvPicPr>
-          <p:cNvPr id="8" name="Image 1" descr="/Users/pop7/Library/CloudStorage/OneDrive-MonsterConnectCo.,Ltd/Lecture/KOSEN69 - software-security/slides/pptx/assets/logo-small.png">    </p:cNvPr>
+          <p:cNvPr id="8" name="Image 1" descr="/private/tmp/claude-501/-Users-pop7-Library-CloudStorage-OneDrive-MonsterConnectCo--Ltd-Lecture-KOSEN69---software-security/e6d6556f-17de-403d-a9a0-cf2f846149b4/scratchpad/tree/slides/pptx/assets/logo-small.png">    </p:cNvPr>
           <p:cNvPicPr>
             <a:picLocks noChangeAspect="1"/>
           </p:cNvPicPr>
@@ -2667,16 +2668,40 @@
           </a:p>
         </p:txBody>
       </p:sp>
-      <p:sp>
-        <p:nvSpPr>
-          <p:cNvPr id="5" name="Text 2"/>
-          <p:cNvSpPr/>
-          <p:nvPr/>
-        </p:nvSpPr>
-        <p:spPr>
-          <a:xfrm>
-            <a:off x="548640" y="1325880"/>
-            <a:ext cx="8046720" cy="2468880"/>
+      <p:pic>
+        <p:nvPicPr>
+          <p:cNvPr id="5" name="Image 1" descr="The same app as two container images side by side, insecure vs hardened, six layers compared: mutable :latest tag vs a pinned digest, a baked-in secret vs runtime injection, root user vs distroless non-root, COPY-everything vs a minimal context, world-writable permissions vs read-only, and an unpinned pip install vs a discarded build stage. Below both, the same argument one layer up: the wildcard IAM policy vs the scoped one. The conclusion: Trivy flags only three of the seven defects shown here — the tag, the root user, and the secret. COPY .., chmod 777, the unpinned install, and the IAM JSON all need manual review; there is no rule for any of them.">    </p:cNvPr>
+          <p:cNvPicPr>
+            <a:picLocks noChangeAspect="1"/>
+          </p:cNvPicPr>
+          <p:nvPr/>
+        </p:nvPicPr>
+        <p:blipFill>
+          <a:blip r:embed="rId2"/>
+          <a:stretch>
+            <a:fillRect/>
+          </a:stretch>
+        </p:blipFill>
+        <p:spPr>
+          <a:xfrm>
+            <a:off x="3036517" y="1097280"/>
+            <a:ext cx="3070967" cy="3566160"/>
+          </a:xfrm>
+          <a:prstGeom prst="rect">
+            <a:avLst/>
+          </a:prstGeom>
+        </p:spPr>
+      </p:pic>
+      <p:sp>
+        <p:nvSpPr>
+          <p:cNvPr id="6" name="Text 2"/>
+          <p:cNvSpPr/>
+          <p:nvPr/>
+        </p:nvSpPr>
+        <p:spPr>
+          <a:xfrm>
+            <a:off x="457200" y="4800600"/>
+            <a:ext cx="6949440" cy="274320"/>
           </a:xfrm>
           <a:prstGeom prst="rect">
             <a:avLst/>
@@ -2685,62 +2710,21 @@
           <a:ln/>
         </p:spPr>
         <p:txBody>
-          <a:bodyPr wrap="square" lIns="0" tIns="0" rIns="0" bIns="0" rtlCol="0" anchor="t">
-            <a:normAutofit/>
-          </a:bodyPr>
+          <a:bodyPr wrap="square" lIns="0" tIns="0" rIns="0" bIns="0" rtlCol="0" anchor="ctr"/>
           <a:lstStyle/>
           <a:p>
             <a:pPr indent="0" marL="0">
               <a:buNone/>
             </a:pPr>
             <a:r>
-              <a:rPr lang="en-US" sz="1400" dirty="0">
-                <a:solidFill>
-                  <a:srgbClr val="1F2937"/>
+              <a:rPr lang="en-US" sz="900" dirty="0">
+                <a:solidFill>
+                  <a:srgbClr val="64748B"/>
                 </a:solidFill>
                 <a:latin typeface="Calibri" pitchFamily="34" charset="0"/>
                 <a:ea typeface="Calibri" pitchFamily="34" charset="-122"/>
                 <a:cs typeface="Calibri" pitchFamily="34" charset="-120"/>
               </a:rPr>
-              <a:t>See diagram: The same app as two container images side by side, insecure vs hardened, six layers compared: mutable :latest tag vs a pinned digest, a baked-in secret vs runtime injection, root user vs distroless non-root, COPY-everything vs a minimal context, world-writable permissions vs read-only, and an unpinned pip install vs a discarded build stage. Below both, the same argument one layer up: the wildcard IAM policy vs the scoped one. The conclusion: Trivy flags only three of the seven defects shown here — the tag, the root user, and the secret. COPY .., chmod 777, the unpinned install, and the IAM JSON all need manual review; there is no rule for any of them. (web only)</a:t>
-            </a:r>
-            <a:endParaRPr lang="en-US" sz="1400" dirty="0"/>
-          </a:p>
-        </p:txBody>
-      </p:sp>
-      <p:sp>
-        <p:nvSpPr>
-          <p:cNvPr id="6" name="Text 3"/>
-          <p:cNvSpPr/>
-          <p:nvPr/>
-        </p:nvSpPr>
-        <p:spPr>
-          <a:xfrm>
-            <a:off x="457200" y="4800600"/>
-            <a:ext cx="6949440" cy="274320"/>
-          </a:xfrm>
-          <a:prstGeom prst="rect">
-            <a:avLst/>
-          </a:prstGeom>
-          <a:noFill/>
-          <a:ln/>
-        </p:spPr>
-        <p:txBody>
-          <a:bodyPr wrap="square" lIns="0" tIns="0" rIns="0" bIns="0" rtlCol="0" anchor="ctr"/>
-          <a:lstStyle/>
-          <a:p>
-            <a:pPr indent="0" marL="0">
-              <a:buNone/>
-            </a:pPr>
-            <a:r>
-              <a:rPr lang="en-US" sz="900" dirty="0">
-                <a:solidFill>
-                  <a:srgbClr val="64748B"/>
-                </a:solidFill>
-                <a:latin typeface="Calibri" pitchFamily="34" charset="0"/>
-                <a:ea typeface="Calibri" pitchFamily="34" charset="-122"/>
-                <a:cs typeface="Calibri" pitchFamily="34" charset="-120"/>
-              </a:rPr>
               <a:t>Software Security · Week 13</a:t>
             </a:r>
             <a:endParaRPr lang="en-US" sz="900" dirty="0"/>
@@ -2749,14 +2733,14 @@
       </p:sp>
       <p:pic>
         <p:nvPicPr>
-          <p:cNvPr id="7" name="Image 1" descr="/Users/pop7/Library/CloudStorage/OneDrive-MonsterConnectCo.,Ltd/Lecture/KOSEN69 - software-security/slides/pptx/assets/logo-small.png">    </p:cNvPr>
+          <p:cNvPr id="7" name="Image 2" descr="/private/tmp/claude-501/-Users-pop7-Library-CloudStorage-OneDrive-MonsterConnectCo--Ltd-Lecture-KOSEN69---software-security/e6d6556f-17de-403d-a9a0-cf2f846149b4/scratchpad/tree/slides/pptx/assets/logo-small.png">    </p:cNvPr>
           <p:cNvPicPr>
             <a:picLocks noChangeAspect="1"/>
           </p:cNvPicPr>
           <p:nvPr/>
         </p:nvPicPr>
         <p:blipFill>
-          <a:blip r:embed="rId2"/>
+          <a:blip r:embed="rId3"/>
           <a:stretch>
             <a:fillRect/>
           </a:stretch>
@@ -3175,7 +3159,7 @@
       </p:sp>
       <p:pic>
         <p:nvPicPr>
-          <p:cNvPr id="13" name="Image 1" descr="/Users/pop7/Library/CloudStorage/OneDrive-MonsterConnectCo.,Ltd/Lecture/KOSEN69 - software-security/slides/pptx/assets/logo-small.png">    </p:cNvPr>
+          <p:cNvPr id="13" name="Image 1" descr="/private/tmp/claude-501/-Users-pop7-Library-CloudStorage-OneDrive-MonsterConnectCo--Ltd-Lecture-KOSEN69---software-security/e6d6556f-17de-403d-a9a0-cf2f846149b4/scratchpad/tree/slides/pptx/assets/logo-small.png">    </p:cNvPr>
           <p:cNvPicPr>
             <a:picLocks noChangeAspect="1"/>
           </p:cNvPicPr>
@@ -3560,7 +3544,7 @@
       </p:sp>
       <p:pic>
         <p:nvPicPr>
-          <p:cNvPr id="10" name="Image 1" descr="/Users/pop7/Library/CloudStorage/OneDrive-MonsterConnectCo.,Ltd/Lecture/KOSEN69 - software-security/slides/pptx/assets/logo-small.png">    </p:cNvPr>
+          <p:cNvPr id="10" name="Image 1" descr="/private/tmp/claude-501/-Users-pop7-Library-CloudStorage-OneDrive-MonsterConnectCo--Ltd-Lecture-KOSEN69---software-security/e6d6556f-17de-403d-a9a0-cf2f846149b4/scratchpad/tree/slides/pptx/assets/logo-small.png">    </p:cNvPr>
           <p:cNvPicPr>
             <a:picLocks noChangeAspect="1"/>
           </p:cNvPicPr>
@@ -3861,7 +3845,7 @@
       </p:sp>
       <p:pic>
         <p:nvPicPr>
-          <p:cNvPr id="8" name="Image 1" descr="/Users/pop7/Library/CloudStorage/OneDrive-MonsterConnectCo.,Ltd/Lecture/KOSEN69 - software-security/slides/pptx/assets/logo-small.png">    </p:cNvPr>
+          <p:cNvPr id="8" name="Image 1" descr="/private/tmp/claude-501/-Users-pop7-Library-CloudStorage-OneDrive-MonsterConnectCo--Ltd-Lecture-KOSEN69---software-security/e6d6556f-17de-403d-a9a0-cf2f846149b4/scratchpad/tree/slides/pptx/assets/logo-small.png">    </p:cNvPr>
           <p:cNvPicPr>
             <a:picLocks noChangeAspect="1"/>
           </p:cNvPicPr>
@@ -3995,7 +3979,7 @@
       </p:sp>
       <p:pic>
         <p:nvPicPr>
-          <p:cNvPr id="4" name="Image 0" descr="/Users/pop7/Library/CloudStorage/OneDrive-MonsterConnectCo.,Ltd/Lecture/KOSEN69 - software-security/slides/pptx/assets/logo-small.png">    </p:cNvPr>
+          <p:cNvPr id="4" name="Image 0" descr="/private/tmp/claude-501/-Users-pop7-Library-CloudStorage-OneDrive-MonsterConnectCo--Ltd-Lecture-KOSEN69---software-security/e6d6556f-17de-403d-a9a0-cf2f846149b4/scratchpad/tree/slides/pptx/assets/logo-small.png">    </p:cNvPr>
           <p:cNvPicPr>
             <a:picLocks noChangeAspect="1"/>
           </p:cNvPicPr>
@@ -4338,7 +4322,7 @@
       </p:sp>
       <p:pic>
         <p:nvPicPr>
-          <p:cNvPr id="8" name="Image 1" descr="/Users/pop7/Library/CloudStorage/OneDrive-MonsterConnectCo.,Ltd/Lecture/KOSEN69 - software-security/slides/pptx/assets/logo-small.png">    </p:cNvPr>
+          <p:cNvPr id="8" name="Image 1" descr="/private/tmp/claude-501/-Users-pop7-Library-CloudStorage-OneDrive-MonsterConnectCo--Ltd-Lecture-KOSEN69---software-security/e6d6556f-17de-403d-a9a0-cf2f846149b4/scratchpad/tree/slides/pptx/assets/logo-small.png">    </p:cNvPr>
           <p:cNvPicPr>
             <a:picLocks noChangeAspect="1"/>
           </p:cNvPicPr>
@@ -4639,7 +4623,7 @@
       </p:sp>
       <p:pic>
         <p:nvPicPr>
-          <p:cNvPr id="8" name="Image 1" descr="/Users/pop7/Library/CloudStorage/OneDrive-MonsterConnectCo.,Ltd/Lecture/KOSEN69 - software-security/slides/pptx/assets/logo-small.png">    </p:cNvPr>
+          <p:cNvPr id="8" name="Image 1" descr="/private/tmp/claude-501/-Users-pop7-Library-CloudStorage-OneDrive-MonsterConnectCo--Ltd-Lecture-KOSEN69---software-security/e6d6556f-17de-403d-a9a0-cf2f846149b4/scratchpad/tree/slides/pptx/assets/logo-small.png">    </p:cNvPr>
           <p:cNvPicPr>
             <a:picLocks noChangeAspect="1"/>
           </p:cNvPicPr>
@@ -4940,7 +4924,7 @@
       </p:sp>
       <p:pic>
         <p:nvPicPr>
-          <p:cNvPr id="8" name="Image 1" descr="/Users/pop7/Library/CloudStorage/OneDrive-MonsterConnectCo.,Ltd/Lecture/KOSEN69 - software-security/slides/pptx/assets/logo-small.png">    </p:cNvPr>
+          <p:cNvPr id="8" name="Image 1" descr="/private/tmp/claude-501/-Users-pop7-Library-CloudStorage-OneDrive-MonsterConnectCo--Ltd-Lecture-KOSEN69---software-security/e6d6556f-17de-403d-a9a0-cf2f846149b4/scratchpad/tree/slides/pptx/assets/logo-small.png">    </p:cNvPr>
           <p:cNvPicPr>
             <a:picLocks noChangeAspect="1"/>
           </p:cNvPicPr>
@@ -5350,7 +5334,7 @@
       </p:sp>
       <p:pic>
         <p:nvPicPr>
-          <p:cNvPr id="11" name="Image 1" descr="/Users/pop7/Library/CloudStorage/OneDrive-MonsterConnectCo.,Ltd/Lecture/KOSEN69 - software-security/slides/pptx/assets/logo-small.png">    </p:cNvPr>
+          <p:cNvPr id="11" name="Image 1" descr="/private/tmp/claude-501/-Users-pop7-Library-CloudStorage-OneDrive-MonsterConnectCo--Ltd-Lecture-KOSEN69---software-security/e6d6556f-17de-403d-a9a0-cf2f846149b4/scratchpad/tree/slides/pptx/assets/logo-small.png">    </p:cNvPr>
           <p:cNvPicPr>
             <a:picLocks noChangeAspect="1"/>
           </p:cNvPicPr>
@@ -5651,7 +5635,7 @@
       </p:sp>
       <p:pic>
         <p:nvPicPr>
-          <p:cNvPr id="8" name="Image 1" descr="/Users/pop7/Library/CloudStorage/OneDrive-MonsterConnectCo.,Ltd/Lecture/KOSEN69 - software-security/slides/pptx/assets/logo-small.png">    </p:cNvPr>
+          <p:cNvPr id="8" name="Image 1" descr="/private/tmp/claude-501/-Users-pop7-Library-CloudStorage-OneDrive-MonsterConnectCo--Ltd-Lecture-KOSEN69---software-security/e6d6556f-17de-403d-a9a0-cf2f846149b4/scratchpad/tree/slides/pptx/assets/logo-small.png">    </p:cNvPr>
           <p:cNvPicPr>
             <a:picLocks noChangeAspect="1"/>
           </p:cNvPicPr>
@@ -5952,7 +5936,7 @@
       </p:sp>
       <p:pic>
         <p:nvPicPr>
-          <p:cNvPr id="8" name="Image 1" descr="/Users/pop7/Library/CloudStorage/OneDrive-MonsterConnectCo.,Ltd/Lecture/KOSEN69 - software-security/slides/pptx/assets/logo-small.png">    </p:cNvPr>
+          <p:cNvPr id="8" name="Image 1" descr="/private/tmp/claude-501/-Users-pop7-Library-CloudStorage-OneDrive-MonsterConnectCo--Ltd-Lecture-KOSEN69---software-security/e6d6556f-17de-403d-a9a0-cf2f846149b4/scratchpad/tree/slides/pptx/assets/logo-small.png">    </p:cNvPr>
           <p:cNvPicPr>
             <a:picLocks noChangeAspect="1"/>
           </p:cNvPicPr>
@@ -6355,7 +6339,7 @@
       </p:sp>
       <p:pic>
         <p:nvPicPr>
-          <p:cNvPr id="10" name="Image 1" descr="/Users/pop7/Library/CloudStorage/OneDrive-MonsterConnectCo.,Ltd/Lecture/KOSEN69 - software-security/slides/pptx/assets/logo-small.png">    </p:cNvPr>
+          <p:cNvPr id="10" name="Image 1" descr="/private/tmp/claude-501/-Users-pop7-Library-CloudStorage-OneDrive-MonsterConnectCo--Ltd-Lecture-KOSEN69---software-security/e6d6556f-17de-403d-a9a0-cf2f846149b4/scratchpad/tree/slides/pptx/assets/logo-small.png">    </p:cNvPr>
           <p:cNvPicPr>
             <a:picLocks noChangeAspect="1"/>
           </p:cNvPicPr>
@@ -6614,7 +6598,7 @@
       </p:sp>
       <p:pic>
         <p:nvPicPr>
-          <p:cNvPr id="8" name="Image 1" descr="/Users/pop7/Library/CloudStorage/OneDrive-MonsterConnectCo.,Ltd/Lecture/KOSEN69 - software-security/slides/pptx/assets/logo-small.png">    </p:cNvPr>
+          <p:cNvPr id="8" name="Image 1" descr="/private/tmp/claude-501/-Users-pop7-Library-CloudStorage-OneDrive-MonsterConnectCo--Ltd-Lecture-KOSEN69---software-security/e6d6556f-17de-403d-a9a0-cf2f846149b4/scratchpad/tree/slides/pptx/assets/logo-small.png">    </p:cNvPr>
           <p:cNvPicPr>
             <a:picLocks noChangeAspect="1"/>
           </p:cNvPicPr>
